--- a/slides/1st_stage/C_business_administration.pptx
+++ b/slides/1st_stage/C_business_administration.pptx
@@ -9869,7 +9869,7 @@
         <p:spPr>
           <a:xfrm>
             <a:off x="502920" y="5129784"/>
-            <a:ext cx="11201400" cy="274320"/>
+            <a:ext cx="11201400" cy="777240"/>
           </a:xfrm>
           <a:prstGeom prst="rect">
             <a:avLst/>
@@ -9888,8 +9888,71 @@
               <a:buNone/>
             </a:pPr>
             <a:r>
+              <a:rPr lang="en-US" sz="850" b="1" dirty="0">
+                <a:solidFill>
+                  <a:srgbClr val="8A8A8A"/>
+                </a:solidFill>
+                <a:latin typeface="Consolas" pitchFamily="34" charset="0"/>
+                <a:ea typeface="Consolas" pitchFamily="34" charset="-122"/>
+                <a:cs typeface="Consolas" pitchFamily="34" charset="-120"/>
+              </a:rPr>
+              <a:t>具体例
+</a:t>
+            </a:r>
+            <a:endParaRPr lang="en-US" sz="850" dirty="0"/>
+          </a:p>
+          <a:p>
+            <a:pPr indent="0" marL="0">
+              <a:lnSpc>
+                <a:spcPct val="120000"/>
+              </a:lnSpc>
+              <a:buNone/>
+            </a:pPr>
+            <a:r>
               <a:rPr lang="en-US" sz="1000" dirty="0">
                 <a:solidFill>
+                  <a:srgbClr val="171717"/>
+                </a:solidFill>
+                <a:latin typeface="Yu Gothic" pitchFamily="34" charset="0"/>
+                <a:ea typeface="Yu Gothic" pitchFamily="34" charset="-122"/>
+                <a:cs typeface="Yu Gothic" pitchFamily="34" charset="-120"/>
+              </a:rPr>
+              <a:t>大手飲料メーカーが自社にない発酵技術を持つスタートアップに出資し、将来の自社事業とのシナジーを狙うのがCVCの典型例。買収して経営統合するM&amp;Aとは異なり、出資先の独立性を保ったまま関係を築く点がポイント。</a:t>
+            </a:r>
+            <a:endParaRPr lang="en-US" sz="850" dirty="0"/>
+          </a:p>
+        </p:txBody>
+      </p:sp>
+      <p:sp>
+        <p:nvSpPr>
+          <p:cNvPr id="18" name="Text 16"/>
+          <p:cNvSpPr txBox="1"/>
+          <p:nvPr/>
+        </p:nvSpPr>
+        <p:spPr>
+          <a:xfrm>
+            <a:off x="502920" y="5980176"/>
+            <a:ext cx="11201400" cy="274320"/>
+          </a:xfrm>
+          <a:prstGeom prst="rect">
+            <a:avLst/>
+          </a:prstGeom>
+          <a:noFill/>
+          <a:ln/>
+        </p:spPr>
+        <p:txBody>
+          <a:bodyPr wrap="square" lIns="0" tIns="0" rIns="0" bIns="0" rtlCol="0" anchor="ctr"/>
+          <a:lstStyle/>
+          <a:p>
+            <a:pPr indent="0" marL="0">
+              <a:lnSpc>
+                <a:spcPct val="120000"/>
+              </a:lnSpc>
+              <a:buNone/>
+            </a:pPr>
+            <a:r>
+              <a:rPr lang="en-US" sz="1000" dirty="0">
+                <a:solidFill>
                   <a:srgbClr val="8A8A8A"/>
                 </a:solidFill>
                 <a:latin typeface="Yu Gothic" pitchFamily="34" charset="0"/>
@@ -9904,13 +9967,13 @@
       </p:sp>
       <p:sp>
         <p:nvSpPr>
-          <p:cNvPr id="18" name="Text 16"/>
-          <p:cNvSpPr txBox="1"/>
-          <p:nvPr/>
-        </p:nvSpPr>
-        <p:spPr>
-          <a:xfrm>
-            <a:off x="502920" y="5495544"/>
+          <p:cNvPr id="19" name="Text 17"/>
+          <p:cNvSpPr txBox="1"/>
+          <p:nvPr/>
+        </p:nvSpPr>
+        <p:spPr>
+          <a:xfrm>
+            <a:off x="502920" y="6345936"/>
             <a:ext cx="11201400" cy="274320"/>
           </a:xfrm>
           <a:prstGeom prst="rect">
@@ -17907,7 +17970,7 @@
         <p:spPr>
           <a:xfrm>
             <a:off x="502920" y="5129784"/>
-            <a:ext cx="11201400" cy="274320"/>
+            <a:ext cx="11201400" cy="777240"/>
           </a:xfrm>
           <a:prstGeom prst="rect">
             <a:avLst/>
@@ -17926,8 +17989,71 @@
               <a:buNone/>
             </a:pPr>
             <a:r>
+              <a:rPr lang="en-US" sz="850" b="1" dirty="0">
+                <a:solidFill>
+                  <a:srgbClr val="8A8A8A"/>
+                </a:solidFill>
+                <a:latin typeface="Consolas" pitchFamily="34" charset="0"/>
+                <a:ea typeface="Consolas" pitchFamily="34" charset="-122"/>
+                <a:cs typeface="Consolas" pitchFamily="34" charset="-120"/>
+              </a:rPr>
+              <a:t>具体例
+</a:t>
+            </a:r>
+            <a:endParaRPr lang="en-US" sz="850" dirty="0"/>
+          </a:p>
+          <a:p>
+            <a:pPr indent="0" marL="0">
+              <a:lnSpc>
+                <a:spcPct val="120000"/>
+              </a:lnSpc>
+              <a:buNone/>
+            </a:pPr>
+            <a:r>
               <a:rPr lang="en-US" sz="1000" dirty="0">
                 <a:solidFill>
+                  <a:srgbClr val="171717"/>
+                </a:solidFill>
+                <a:latin typeface="Yu Gothic" pitchFamily="34" charset="0"/>
+                <a:ea typeface="Yu Gothic" pitchFamily="34" charset="-122"/>
+                <a:cs typeface="Yu Gothic" pitchFamily="34" charset="-120"/>
+              </a:rPr>
+              <a:t>「精密加工技術」をコア技術に持つ工作機械メーカーが、医療機器・航空宇宙部品にも技術を横展開し、各分野で得た知見を工作機械自体の技術力向上にも還元するのがエの記述そのものの実践例。</a:t>
+            </a:r>
+            <a:endParaRPr lang="en-US" sz="850" dirty="0"/>
+          </a:p>
+        </p:txBody>
+      </p:sp>
+      <p:sp>
+        <p:nvSpPr>
+          <p:cNvPr id="18" name="Text 16"/>
+          <p:cNvSpPr txBox="1"/>
+          <p:nvPr/>
+        </p:nvSpPr>
+        <p:spPr>
+          <a:xfrm>
+            <a:off x="502920" y="5980176"/>
+            <a:ext cx="11201400" cy="274320"/>
+          </a:xfrm>
+          <a:prstGeom prst="rect">
+            <a:avLst/>
+          </a:prstGeom>
+          <a:noFill/>
+          <a:ln/>
+        </p:spPr>
+        <p:txBody>
+          <a:bodyPr wrap="square" lIns="0" tIns="0" rIns="0" bIns="0" rtlCol="0" anchor="ctr"/>
+          <a:lstStyle/>
+          <a:p>
+            <a:pPr indent="0" marL="0">
+              <a:lnSpc>
+                <a:spcPct val="120000"/>
+              </a:lnSpc>
+              <a:buNone/>
+            </a:pPr>
+            <a:r>
+              <a:rPr lang="en-US" sz="1000" dirty="0">
+                <a:solidFill>
                   <a:srgbClr val="8A8A8A"/>
                 </a:solidFill>
                 <a:latin typeface="Yu Gothic" pitchFamily="34" charset="0"/>
@@ -17942,13 +18068,13 @@
       </p:sp>
       <p:sp>
         <p:nvSpPr>
-          <p:cNvPr id="18" name="Text 16"/>
-          <p:cNvSpPr txBox="1"/>
-          <p:nvPr/>
-        </p:nvSpPr>
-        <p:spPr>
-          <a:xfrm>
-            <a:off x="502920" y="5495544"/>
+          <p:cNvPr id="19" name="Text 17"/>
+          <p:cNvSpPr txBox="1"/>
+          <p:nvPr/>
+        </p:nvSpPr>
+        <p:spPr>
+          <a:xfrm>
+            <a:off x="502920" y="6345936"/>
             <a:ext cx="11201400" cy="274320"/>
           </a:xfrm>
           <a:prstGeom prst="rect">
@@ -20808,7 +20934,7 @@
         <p:spPr>
           <a:xfrm>
             <a:off x="502920" y="5129784"/>
-            <a:ext cx="11201400" cy="274320"/>
+            <a:ext cx="11201400" cy="777240"/>
           </a:xfrm>
           <a:prstGeom prst="rect">
             <a:avLst/>
@@ -20827,8 +20953,71 @@
               <a:buNone/>
             </a:pPr>
             <a:r>
+              <a:rPr lang="en-US" sz="850" b="1" dirty="0">
+                <a:solidFill>
+                  <a:srgbClr val="8A8A8A"/>
+                </a:solidFill>
+                <a:latin typeface="Consolas" pitchFamily="34" charset="0"/>
+                <a:ea typeface="Consolas" pitchFamily="34" charset="-122"/>
+                <a:cs typeface="Consolas" pitchFamily="34" charset="-120"/>
+              </a:rPr>
+              <a:t>具体例
+</a:t>
+            </a:r>
+            <a:endParaRPr lang="en-US" sz="850" dirty="0"/>
+          </a:p>
+          <a:p>
+            <a:pPr indent="0" marL="0">
+              <a:lnSpc>
+                <a:spcPct val="120000"/>
+              </a:lnSpc>
+              <a:buNone/>
+            </a:pPr>
+            <a:r>
               <a:rPr lang="en-US" sz="1000" dirty="0">
                 <a:solidFill>
+                  <a:srgbClr val="171717"/>
+                </a:solidFill>
+                <a:latin typeface="Yu Gothic" pitchFamily="34" charset="0"/>
+                <a:ea typeface="Yu Gothic" pitchFamily="34" charset="-122"/>
+                <a:cs typeface="Yu Gothic" pitchFamily="34" charset="-120"/>
+              </a:rPr>
+              <a:t>マウンテンバイクは、既存の自転車に飽き足らない愛好家（リード・ユーザー）自身が山道走行用に独自改造・開発したことから発展した、ユーザー・イノベーションの代表的な歴史的事例としてよく引用される。</a:t>
+            </a:r>
+            <a:endParaRPr lang="en-US" sz="850" dirty="0"/>
+          </a:p>
+        </p:txBody>
+      </p:sp>
+      <p:sp>
+        <p:nvSpPr>
+          <p:cNvPr id="18" name="Text 16"/>
+          <p:cNvSpPr txBox="1"/>
+          <p:nvPr/>
+        </p:nvSpPr>
+        <p:spPr>
+          <a:xfrm>
+            <a:off x="502920" y="5980176"/>
+            <a:ext cx="11201400" cy="274320"/>
+          </a:xfrm>
+          <a:prstGeom prst="rect">
+            <a:avLst/>
+          </a:prstGeom>
+          <a:noFill/>
+          <a:ln/>
+        </p:spPr>
+        <p:txBody>
+          <a:bodyPr wrap="square" lIns="0" tIns="0" rIns="0" bIns="0" rtlCol="0" anchor="ctr"/>
+          <a:lstStyle/>
+          <a:p>
+            <a:pPr indent="0" marL="0">
+              <a:lnSpc>
+                <a:spcPct val="120000"/>
+              </a:lnSpc>
+              <a:buNone/>
+            </a:pPr>
+            <a:r>
+              <a:rPr lang="en-US" sz="1000" dirty="0">
+                <a:solidFill>
                   <a:srgbClr val="8A8A8A"/>
                 </a:solidFill>
                 <a:latin typeface="Yu Gothic" pitchFamily="34" charset="0"/>
@@ -20843,13 +21032,13 @@
       </p:sp>
       <p:sp>
         <p:nvSpPr>
-          <p:cNvPr id="18" name="Text 16"/>
-          <p:cNvSpPr txBox="1"/>
-          <p:nvPr/>
-        </p:nvSpPr>
-        <p:spPr>
-          <a:xfrm>
-            <a:off x="502920" y="5495544"/>
+          <p:cNvPr id="19" name="Text 17"/>
+          <p:cNvSpPr txBox="1"/>
+          <p:nvPr/>
+        </p:nvSpPr>
+        <p:spPr>
+          <a:xfrm>
+            <a:off x="502920" y="6345936"/>
             <a:ext cx="11201400" cy="274320"/>
           </a:xfrm>
           <a:prstGeom prst="rect">
@@ -30300,7 +30489,7 @@
         <p:spPr>
           <a:xfrm>
             <a:off x="502920" y="5056632"/>
-            <a:ext cx="11201400" cy="365760"/>
+            <a:ext cx="11201400" cy="777240"/>
           </a:xfrm>
           <a:prstGeom prst="rect">
             <a:avLst/>
@@ -30319,8 +30508,71 @@
               <a:buNone/>
             </a:pPr>
             <a:r>
+              <a:rPr lang="en-US" sz="850" b="1" dirty="0">
+                <a:solidFill>
+                  <a:srgbClr val="8A8A8A"/>
+                </a:solidFill>
+                <a:latin typeface="Consolas" pitchFamily="34" charset="0"/>
+                <a:ea typeface="Consolas" pitchFamily="34" charset="-122"/>
+                <a:cs typeface="Consolas" pitchFamily="34" charset="-120"/>
+              </a:rPr>
+              <a:t>具体例
+</a:t>
+            </a:r>
+            <a:endParaRPr lang="en-US" sz="850" dirty="0"/>
+          </a:p>
+          <a:p>
+            <a:pPr indent="0" marL="0">
+              <a:lnSpc>
+                <a:spcPct val="120000"/>
+              </a:lnSpc>
+              <a:buNone/>
+            </a:pPr>
+            <a:r>
               <a:rPr lang="en-US" sz="1000" dirty="0">
                 <a:solidFill>
+                  <a:srgbClr val="171717"/>
+                </a:solidFill>
+                <a:latin typeface="Yu Gothic" pitchFamily="34" charset="0"/>
+                <a:ea typeface="Yu Gothic" pitchFamily="34" charset="-122"/>
+                <a:cs typeface="Yu Gothic" pitchFamily="34" charset="-120"/>
+              </a:rPr>
+              <a:t>三代続く和菓子屋が長年かけて築いた「職人の技」は、他社が一朝一夕に習得できない（経路依存性＝イ）。逆にその技が広く知られていたり（ウ）、代替の資源を外部調達できたり（オ）すれば、模倣は容易になり優位性は弱まる。</a:t>
+            </a:r>
+            <a:endParaRPr lang="en-US" sz="850" dirty="0"/>
+          </a:p>
+        </p:txBody>
+      </p:sp>
+      <p:sp>
+        <p:nvSpPr>
+          <p:cNvPr id="18" name="Text 16"/>
+          <p:cNvSpPr txBox="1"/>
+          <p:nvPr/>
+        </p:nvSpPr>
+        <p:spPr>
+          <a:xfrm>
+            <a:off x="502920" y="5907024"/>
+            <a:ext cx="11201400" cy="365760"/>
+          </a:xfrm>
+          <a:prstGeom prst="rect">
+            <a:avLst/>
+          </a:prstGeom>
+          <a:noFill/>
+          <a:ln/>
+        </p:spPr>
+        <p:txBody>
+          <a:bodyPr wrap="square" lIns="0" tIns="0" rIns="0" bIns="0" rtlCol="0" anchor="ctr"/>
+          <a:lstStyle/>
+          <a:p>
+            <a:pPr indent="0" marL="0">
+              <a:lnSpc>
+                <a:spcPct val="120000"/>
+              </a:lnSpc>
+              <a:buNone/>
+            </a:pPr>
+            <a:r>
+              <a:rPr lang="en-US" sz="1000" dirty="0">
+                <a:solidFill>
                   <a:srgbClr val="8A8A8A"/>
                 </a:solidFill>
                 <a:latin typeface="Yu Gothic" pitchFamily="34" charset="0"/>
@@ -30335,13 +30587,13 @@
       </p:sp>
       <p:sp>
         <p:nvSpPr>
-          <p:cNvPr id="18" name="Text 16"/>
-          <p:cNvSpPr txBox="1"/>
-          <p:nvPr/>
-        </p:nvSpPr>
-        <p:spPr>
-          <a:xfrm>
-            <a:off x="502920" y="5513832"/>
+          <p:cNvPr id="19" name="Text 17"/>
+          <p:cNvSpPr txBox="1"/>
+          <p:nvPr/>
+        </p:nvSpPr>
+        <p:spPr>
+          <a:xfrm>
+            <a:off x="502920" y="6364224"/>
             <a:ext cx="11201400" cy="274320"/>
           </a:xfrm>
           <a:prstGeom prst="rect">
@@ -34983,7 +35235,7 @@
         <p:spPr>
           <a:xfrm>
             <a:off x="502920" y="4919472"/>
-            <a:ext cx="11201400" cy="365760"/>
+            <a:ext cx="11201400" cy="777240"/>
           </a:xfrm>
           <a:prstGeom prst="rect">
             <a:avLst/>
@@ -35002,8 +35254,71 @@
               <a:buNone/>
             </a:pPr>
             <a:r>
+              <a:rPr lang="en-US" sz="850" b="1" dirty="0">
+                <a:solidFill>
+                  <a:srgbClr val="8A8A8A"/>
+                </a:solidFill>
+                <a:latin typeface="Consolas" pitchFamily="34" charset="0"/>
+                <a:ea typeface="Consolas" pitchFamily="34" charset="-122"/>
+                <a:cs typeface="Consolas" pitchFamily="34" charset="-120"/>
+              </a:rPr>
+              <a:t>具体例
+</a:t>
+            </a:r>
+            <a:endParaRPr lang="en-US" sz="850" dirty="0"/>
+          </a:p>
+          <a:p>
+            <a:pPr indent="0" marL="0">
+              <a:lnSpc>
+                <a:spcPct val="120000"/>
+              </a:lnSpc>
+              <a:buNone/>
+            </a:pPr>
+            <a:r>
               <a:rPr lang="en-US" sz="1000" dirty="0">
                 <a:solidFill>
+                  <a:srgbClr val="171717"/>
+                </a:solidFill>
+                <a:latin typeface="Yu Gothic" pitchFamily="34" charset="0"/>
+                <a:ea typeface="Yu Gothic" pitchFamily="34" charset="-122"/>
+                <a:cs typeface="Yu Gothic" pitchFamily="34" charset="-120"/>
+              </a:rPr>
+              <a:t>例えばアの「自社ECサイトを立ち上げ、既存シリアル市場でのシェア拡大を狙う」は、製品・市場とも既存のままの施策＝実態は「市場浸透戦略」なのに、選択肢は「多角化戦略」と誤って名付けている。まず施策の実態を製品×市場で判定してから戦略名が一致するか照合するのがコツ。</a:t>
+            </a:r>
+            <a:endParaRPr lang="en-US" sz="850" dirty="0"/>
+          </a:p>
+        </p:txBody>
+      </p:sp>
+      <p:sp>
+        <p:nvSpPr>
+          <p:cNvPr id="18" name="Text 16"/>
+          <p:cNvSpPr txBox="1"/>
+          <p:nvPr/>
+        </p:nvSpPr>
+        <p:spPr>
+          <a:xfrm>
+            <a:off x="502920" y="5769864"/>
+            <a:ext cx="11201400" cy="365760"/>
+          </a:xfrm>
+          <a:prstGeom prst="rect">
+            <a:avLst/>
+          </a:prstGeom>
+          <a:noFill/>
+          <a:ln/>
+        </p:spPr>
+        <p:txBody>
+          <a:bodyPr wrap="square" lIns="0" tIns="0" rIns="0" bIns="0" rtlCol="0" anchor="ctr"/>
+          <a:lstStyle/>
+          <a:p>
+            <a:pPr indent="0" marL="0">
+              <a:lnSpc>
+                <a:spcPct val="120000"/>
+              </a:lnSpc>
+              <a:buNone/>
+            </a:pPr>
+            <a:r>
+              <a:rPr lang="en-US" sz="1000" dirty="0">
+                <a:solidFill>
                   <a:srgbClr val="8A8A8A"/>
                 </a:solidFill>
                 <a:latin typeface="Yu Gothic" pitchFamily="34" charset="0"/>
@@ -35018,13 +35333,13 @@
       </p:sp>
       <p:sp>
         <p:nvSpPr>
-          <p:cNvPr id="18" name="Text 16"/>
-          <p:cNvSpPr txBox="1"/>
-          <p:nvPr/>
-        </p:nvSpPr>
-        <p:spPr>
-          <a:xfrm>
-            <a:off x="502920" y="5376672"/>
+          <p:cNvPr id="19" name="Text 17"/>
+          <p:cNvSpPr txBox="1"/>
+          <p:nvPr/>
+        </p:nvSpPr>
+        <p:spPr>
+          <a:xfrm>
+            <a:off x="502920" y="6227064"/>
             <a:ext cx="11201400" cy="274320"/>
           </a:xfrm>
           <a:prstGeom prst="rect">
